--- a/test/fixtures/presentation.pptx
+++ b/test/fixtures/presentation.pptx
@@ -5,25 +5,65 @@
     <p:sldMasterId id="2147483648" r:id="rId1"/>
   </p:sldMasterIdLst>
   <p:sldIdLst>
-    <p:sldId id="256" r:id="rId2"/>
-    <p:sldId id="257" r:id="rId3"/>
-    <p:sldId id="258" r:id="rId5"/>
+    <p:sldId id="256" r:id="rId10"/>
+    <p:sldId id="257" r:id="rId11"/>
+    <p:sldId id="258" r:id="rId12"/>
   </p:sldIdLst>
   <p:sldSz cx="12192000" cy="6858000"/>
   <p:notesSz cx="6858000" cy="9144000"/>
+  <p:defaultTextStyle>
+    <a:lvl1pPr>
+      <a:defRPr sz="1800">
+        <a:solidFill>
+          <a:schemeClr val="tx1"/>
+        </a:solidFill>
+        <a:latin typeface="+mn-lt"/>
+      </a:defRPr>
+    </a:lvl1pPr>
+  </p:defaultTextStyle>
 </p:presentation>
 </file>
 
 <file path=ppt/slideLayouts/slideLayout1.xml><?xml version="1.0" encoding="utf-8"?>
-<p:sldLayout xmlns:a="http://schemas.openxmlformats.org/drawingml/2006/main" xmlns:r="http://schemas.openxmlformats.org/officeDocument/2006/relationships" xmlns:p="http://schemas.openxmlformats.org/presentationml/2006/main" type="blank">
-  <p:cSld name="Blank">
+<p:sldLayout xmlns:a="http://schemas.openxmlformats.org/drawingml/2006/main" xmlns:r="http://schemas.openxmlformats.org/officeDocument/2006/relationships" xmlns:p="http://schemas.openxmlformats.org/presentationml/2006/main" type="titleOnly" preserve="1">
+  <p:cSld name="Title only">
     <p:spTree>
       <p:nvGrpSpPr>
         <p:cNvPr id="1" name=""/>
         <p:cNvGrpSpPr/>
         <p:nvPr/>
       </p:nvGrpSpPr>
-      <p:grpSpPr/>
+      <p:grpSpPr>
+        <a:xfrm>
+          <a:off x="0" y="0"/>
+          <a:ext cx="0" cy="0"/>
+          <a:chOff x="0" y="0"/>
+          <a:chExt cx="0" cy="0"/>
+        </a:xfrm>
+      </p:grpSpPr>
+      <p:sp>
+        <p:nvSpPr>
+          <p:cNvPr id="2" name="Title"/>
+          <p:cNvSpPr>
+            <a:spLocks noGrp="1"/>
+          </p:cNvSpPr>
+          <p:nvPr>
+            <p:ph type="title"/>
+          </p:nvPr>
+        </p:nvSpPr>
+        <p:spPr/>
+        <p:txBody>
+          <a:bodyPr/>
+          <a:lstStyle/>
+          <a:p>
+            <a:r>
+              <a:rPr lang="en-US"/>
+              <a:t>Title</a:t>
+            </a:r>
+            <a:endParaRPr lang="en-US"/>
+          </a:p>
+        </p:txBody>
+      </p:sp>
     </p:spTree>
   </p:cSld>
   <p:clrMapOvr>
@@ -33,15 +73,22 @@
 </file>
 
 <file path=ppt/slideLayouts/slideLayout2.xml><?xml version="1.0" encoding="utf-8"?>
-<p:sldLayout xmlns:a="http://schemas.openxmlformats.org/drawingml/2006/main" xmlns:r="http://schemas.openxmlformats.org/officeDocument/2006/relationships" xmlns:p="http://schemas.openxmlformats.org/presentationml/2006/main" type="obj">
-  <p:cSld name="Title and Content">
+<p:sldLayout xmlns:a="http://schemas.openxmlformats.org/drawingml/2006/main" xmlns:r="http://schemas.openxmlformats.org/officeDocument/2006/relationships" xmlns:p="http://schemas.openxmlformats.org/presentationml/2006/main" type="obj" preserve="1">
+  <p:cSld name="Title and content">
     <p:spTree>
       <p:nvGrpSpPr>
         <p:cNvPr id="1" name=""/>
         <p:cNvGrpSpPr/>
         <p:nvPr/>
       </p:nvGrpSpPr>
-      <p:grpSpPr/>
+      <p:grpSpPr>
+        <a:xfrm>
+          <a:off x="0" y="0"/>
+          <a:ext cx="0" cy="0"/>
+          <a:chOff x="0" y="0"/>
+          <a:chExt cx="0" cy="0"/>
+        </a:xfrm>
+      </p:grpSpPr>
       <p:sp>
         <p:nvSpPr>
           <p:cNvPr id="2" name="Title"/>
@@ -52,12 +99,7 @@
             <p:ph type="title"/>
           </p:nvPr>
         </p:nvSpPr>
-        <p:spPr>
-          <a:xfrm>
-            <a:off x="609600" y="365125"/>
-            <a:ext cx="10972800" cy="1325563"/>
-          </a:xfrm>
-        </p:spPr>
+        <p:spPr/>
         <p:txBody>
           <a:bodyPr/>
           <a:lstStyle/>
@@ -66,6 +108,7 @@
               <a:rPr lang="en-US"/>
               <a:t>Title</a:t>
             </a:r>
+            <a:endParaRPr lang="en-US"/>
           </a:p>
         </p:txBody>
       </p:sp>
@@ -79,12 +122,7 @@
             <p:ph idx="1"/>
           </p:nvPr>
         </p:nvSpPr>
-        <p:spPr>
-          <a:xfrm>
-            <a:off x="609600" y="1825625"/>
-            <a:ext cx="6400800" cy="4351338"/>
-          </a:xfrm>
-        </p:spPr>
+        <p:spPr/>
         <p:txBody>
           <a:bodyPr/>
           <a:lstStyle/>
@@ -93,6 +131,7 @@
               <a:rPr lang="en-US"/>
               <a:t>Text</a:t>
             </a:r>
+            <a:endParaRPr lang="en-US"/>
           </a:p>
         </p:txBody>
       </p:sp>
@@ -107,16 +146,50 @@
 <file path=ppt/slideMasters/slideMaster1.xml><?xml version="1.0" encoding="utf-8"?>
 <p:sldMaster xmlns:a="http://schemas.openxmlformats.org/drawingml/2006/main" xmlns:r="http://schemas.openxmlformats.org/officeDocument/2006/relationships" xmlns:p="http://schemas.openxmlformats.org/presentationml/2006/main">
   <p:cSld>
+    <p:bg>
+      <p:bgRef idx="1001">
+        <a:schemeClr val="bg1"/>
+      </p:bgRef>
+    </p:bg>
     <p:spTree>
       <p:nvGrpSpPr>
         <p:cNvPr id="1" name=""/>
         <p:cNvGrpSpPr/>
         <p:nvPr/>
       </p:nvGrpSpPr>
-      <p:grpSpPr/>
-      <p:sp>
-        <p:nvSpPr>
-          <p:cNvPr id="2" name="Title placeholder"/>
+      <p:grpSpPr>
+        <a:xfrm>
+          <a:off x="0" y="0"/>
+          <a:ext cx="0" cy="0"/>
+          <a:chOff x="0" y="0"/>
+          <a:chExt cx="0" cy="0"/>
+        </a:xfrm>
+      </p:grpSpPr>
+      <p:sp>
+        <p:nvSpPr>
+          <p:cNvPr id="9" name="Accent bar"/>
+          <p:cNvSpPr/>
+          <p:nvPr userDrawn="1"/>
+        </p:nvSpPr>
+        <p:spPr>
+          <a:xfrm>
+            <a:off x="0" y="0"/>
+            <a:ext cx="12192000" cy="76200"/>
+          </a:xfrm>
+          <a:prstGeom prst="rect">
+            <a:avLst/>
+          </a:prstGeom>
+          <a:solidFill>
+            <a:schemeClr val="accent1"/>
+          </a:solidFill>
+          <a:ln>
+            <a:noFill/>
+          </a:ln>
+        </p:spPr>
+      </p:sp>
+      <p:sp>
+        <p:nvSpPr>
+          <p:cNvPr id="2" name="Title"/>
           <p:cNvSpPr>
             <a:spLocks noGrp="1"/>
           </p:cNvSpPr>
@@ -126,8 +199,8 @@
         </p:nvSpPr>
         <p:spPr>
           <a:xfrm>
-            <a:off x="609600" y="365125"/>
-            <a:ext cx="10972800" cy="1325563"/>
+            <a:off x="457200" y="228600"/>
+            <a:ext cx="11277600" cy="635000"/>
           </a:xfrm>
         </p:spPr>
         <p:txBody>
@@ -138,12 +211,13 @@
               <a:rPr lang="en-US"/>
               <a:t>Title</a:t>
             </a:r>
-          </a:p>
-        </p:txBody>
-      </p:sp>
-      <p:sp>
-        <p:nvSpPr>
-          <p:cNvPr id="3" name="Text placeholder"/>
+            <a:endParaRPr lang="en-US"/>
+          </a:p>
+        </p:txBody>
+      </p:sp>
+      <p:sp>
+        <p:nvSpPr>
+          <p:cNvPr id="3" name="Text"/>
           <p:cNvSpPr>
             <a:spLocks noGrp="1"/>
           </p:cNvSpPr>
@@ -153,8 +227,8 @@
         </p:nvSpPr>
         <p:spPr>
           <a:xfrm>
-            <a:off x="609600" y="1825625"/>
-            <a:ext cx="10972800" cy="4351338"/>
+            <a:off x="457200" y="1016000"/>
+            <a:ext cx="11277600" cy="5207000"/>
           </a:xfrm>
         </p:spPr>
         <p:txBody>
@@ -165,6 +239,35 @@
               <a:rPr lang="en-US"/>
               <a:t>Text</a:t>
             </a:r>
+            <a:endParaRPr lang="en-US"/>
+          </a:p>
+        </p:txBody>
+      </p:sp>
+      <p:sp>
+        <p:nvSpPr>
+          <p:cNvPr id="4" name="Slide number"/>
+          <p:cNvSpPr>
+            <a:spLocks noGrp="1"/>
+          </p:cNvSpPr>
+          <p:nvPr>
+            <p:ph type="sldNum" sz="quarter" idx="12"/>
+          </p:nvPr>
+        </p:nvSpPr>
+        <p:spPr>
+          <a:xfrm>
+            <a:off x="10972800" y="6477000"/>
+            <a:ext cx="762000" cy="254000"/>
+          </a:xfrm>
+        </p:spPr>
+        <p:txBody>
+          <a:bodyPr/>
+          <a:lstStyle/>
+          <a:p>
+            <a:r>
+              <a:rPr lang="en-US"/>
+              <a:t>‹#›</a:t>
+            </a:r>
+            <a:endParaRPr lang="en-US"/>
           </a:p>
         </p:txBody>
       </p:sp>
@@ -173,12 +276,16 @@
   <p:clrMap bg1="lt1" tx1="dk1" bg2="lt2" tx2="dk2" accent1="accent1" accent2="accent2" accent3="accent3" accent4="accent4" accent5="accent5" accent6="accent6" hlink="hlink" folHlink="folHlink"/>
   <p:sldLayoutIdLst>
     <p:sldLayoutId id="2147483649" r:id="rId1"/>
-    <p:sldLayoutId id="2147483650" r:id="rId3"/>
+    <p:sldLayoutId id="2147483650" r:id="rId2"/>
   </p:sldLayoutIdLst>
   <p:txStyles>
     <p:titleStyle>
       <a:lvl1pPr algn="l">
-        <a:defRPr sz="4000" b="1">
+        <a:lnSpc>
+          <a:spcPct val="90000"/>
+        </a:lnSpc>
+        <a:buNone/>
+        <a:defRPr sz="3600">
           <a:solidFill>
             <a:schemeClr val="tx1"/>
           </a:solidFill>
@@ -187,20 +294,95 @@
       </a:lvl1pPr>
     </p:titleStyle>
     <p:bodyStyle>
-      <a:lvl1pPr marL="342900" indent="-342900">
+      <a:lvl1pPr marL="228600" indent="-228600" algn="l">
+        <a:lnSpc>
+          <a:spcPct val="90000"/>
+        </a:lnSpc>
+        <a:spcBef>
+          <a:spcPts val="1000"/>
+        </a:spcBef>
         <a:buFont typeface="Arial"/>
         <a:buChar char="•"/>
         <a:defRPr sz="2400">
           <a:solidFill>
-            <a:schemeClr val="accent1"/>
+            <a:schemeClr val="tx1"/>
           </a:solidFill>
           <a:latin typeface="+mn-lt"/>
         </a:defRPr>
       </a:lvl1pPr>
+      <a:lvl2pPr marL="571500" indent="-228600" algn="l">
+        <a:lnSpc>
+          <a:spcPct val="90000"/>
+        </a:lnSpc>
+        <a:spcBef>
+          <a:spcPts val="500"/>
+        </a:spcBef>
+        <a:buFont typeface="Arial"/>
+        <a:buChar char="•"/>
+        <a:defRPr sz="2000">
+          <a:solidFill>
+            <a:schemeClr val="tx1"/>
+          </a:solidFill>
+          <a:latin typeface="+mn-lt"/>
+        </a:defRPr>
+      </a:lvl2pPr>
+      <a:lvl3pPr marL="914400" indent="-228600" algn="l">
+        <a:lnSpc>
+          <a:spcPct val="90000"/>
+        </a:lnSpc>
+        <a:spcBef>
+          <a:spcPts val="500"/>
+        </a:spcBef>
+        <a:buFont typeface="Arial"/>
+        <a:buChar char="•"/>
+        <a:defRPr sz="1800">
+          <a:solidFill>
+            <a:schemeClr val="tx1"/>
+          </a:solidFill>
+          <a:latin typeface="+mn-lt"/>
+        </a:defRPr>
+      </a:lvl3pPr>
+      <a:lvl4pPr marL="1257300" indent="-228600" algn="l">
+        <a:lnSpc>
+          <a:spcPct val="90000"/>
+        </a:lnSpc>
+        <a:spcBef>
+          <a:spcPts val="500"/>
+        </a:spcBef>
+        <a:buFont typeface="Arial"/>
+        <a:buChar char="•"/>
+        <a:defRPr sz="1600">
+          <a:solidFill>
+            <a:schemeClr val="tx1"/>
+          </a:solidFill>
+          <a:latin typeface="+mn-lt"/>
+        </a:defRPr>
+      </a:lvl4pPr>
+      <a:lvl5pPr marL="1600200" indent="-228600" algn="l">
+        <a:lnSpc>
+          <a:spcPct val="90000"/>
+        </a:lnSpc>
+        <a:spcBef>
+          <a:spcPts val="500"/>
+        </a:spcBef>
+        <a:buFont typeface="Arial"/>
+        <a:buChar char="•"/>
+        <a:defRPr sz="1600">
+          <a:solidFill>
+            <a:schemeClr val="tx1"/>
+          </a:solidFill>
+          <a:latin typeface="+mn-lt"/>
+        </a:defRPr>
+      </a:lvl5pPr>
     </p:bodyStyle>
     <p:otherStyle>
       <a:lvl1pPr>
-        <a:defRPr sz="1800"/>
+        <a:defRPr sz="1800">
+          <a:solidFill>
+            <a:schemeClr val="tx1"/>
+          </a:solidFill>
+          <a:latin typeface="+mn-lt"/>
+        </a:defRPr>
       </a:lvl1pPr>
     </p:otherStyle>
   </p:txStyles>
@@ -224,10 +406,17 @@
         <p:cNvGrpSpPr/>
         <p:nvPr/>
       </p:nvGrpSpPr>
-      <p:grpSpPr/>
-      <p:sp>
-        <p:nvSpPr>
-          <p:cNvPr id="2" name="Shape 2"/>
+      <p:grpSpPr>
+        <a:xfrm>
+          <a:off x="0" y="0"/>
+          <a:ext cx="0" cy="0"/>
+          <a:chOff x="0" y="0"/>
+          <a:chExt cx="0" cy="0"/>
+        </a:xfrm>
+      </p:grpSpPr>
+      <p:sp>
+        <p:nvSpPr>
+          <p:cNvPr id="2" name="Band 2"/>
           <p:cNvSpPr/>
           <p:nvPr/>
         </p:nvSpPr>
@@ -240,7 +429,7 @@
             <a:avLst/>
           </a:prstGeom>
           <a:solidFill>
-            <a:srgbClr val="F29A38"/>
+            <a:schemeClr val="accent2"/>
           </a:solidFill>
           <a:ln>
             <a:noFill/>
@@ -249,7 +438,7 @@
       </p:sp>
       <p:sp>
         <p:nvSpPr>
-          <p:cNvPr id="3" name="Title"/>
+          <p:cNvPr id="3" name="Text box 3"/>
           <p:cNvSpPr txBox="1"/>
           <p:nvPr/>
         </p:nvSpPr>
@@ -263,24 +452,20 @@
           </a:prstGeom>
         </p:spPr>
         <p:txBody>
-          <a:bodyPr wrap="square"/>
-          <a:lstStyle/>
-          <a:p>
-            <a:r>
-              <a:rPr lang="en-US" sz="5400" b="1">
-                <a:solidFill>
-                  <a:srgbClr val="1B1E23"/>
-                </a:solidFill>
-                <a:latin typeface="Arial"/>
-              </a:rPr>
-              <a:t>Everything Viewer</a:t>
-            </a:r>
-          </a:p>
-        </p:txBody>
-      </p:sp>
-      <p:sp>
-        <p:nvSpPr>
-          <p:cNvPr id="4" name="Subtitle"/>
+          <a:bodyPr wrap="square" lIns="0" tIns="0" rIns="0" bIns="0"/>
+          <a:lstStyle/>
+          <a:p>
+            <a:r>
+              <a:rPr lang="en-US" sz="5400" b="1"/>
+              <a:t>ooxml-pages</a:t>
+            </a:r>
+            <a:endParaRPr lang="en-US"/>
+          </a:p>
+        </p:txBody>
+      </p:sp>
+      <p:sp>
+        <p:nvSpPr>
+          <p:cNvPr id="4" name="Text box 4"/>
           <p:cNvSpPr txBox="1"/>
           <p:nvPr/>
         </p:nvSpPr>
@@ -294,7 +479,7 @@
           </a:prstGeom>
         </p:spPr>
         <p:txBody>
-          <a:bodyPr wrap="square"/>
+          <a:bodyPr wrap="square" lIns="0" tIns="0" rIns="0" bIns="0"/>
           <a:lstStyle/>
           <a:p>
             <a:r>
@@ -302,10 +487,10 @@
                 <a:solidFill>
                   <a:srgbClr val="525B66"/>
                 </a:solidFill>
-                <a:latin typeface="Arial"/>
               </a:rPr>
-              <a:t>Sample presentation, generated by generate-samples.mjs</a:t>
-            </a:r>
+              <a:t>Sample presentation, written by scripts/generate-pptx-samples.mjs</a:t>
+            </a:r>
+            <a:endParaRPr lang="en-US"/>
           </a:p>
         </p:txBody>
       </p:sp>
@@ -320,49 +505,40 @@
 <file path=ppt/slides/slide2.xml><?xml version="1.0" encoding="utf-8"?>
 <p:sld xmlns:a="http://schemas.openxmlformats.org/drawingml/2006/main" xmlns:r="http://schemas.openxmlformats.org/officeDocument/2006/relationships" xmlns:p="http://schemas.openxmlformats.org/presentationml/2006/main">
   <p:cSld>
-    <p:bg>
-      <p:bgPr>
-        <a:solidFill>
-          <a:srgbClr val="FFFFFF"/>
-        </a:solidFill>
-        <a:effectLst/>
-      </p:bgPr>
-    </p:bg>
     <p:spTree>
       <p:nvGrpSpPr>
         <p:cNvPr id="1" name=""/>
         <p:cNvGrpSpPr/>
         <p:nvPr/>
       </p:nvGrpSpPr>
-      <p:grpSpPr/>
-      <p:sp>
-        <p:nvSpPr>
-          <p:cNvPr id="2" name="Title"/>
-          <p:cNvSpPr txBox="1"/>
-          <p:nvPr/>
-        </p:nvSpPr>
-        <p:spPr>
-          <a:xfrm>
-            <a:off x="609600" y="457200"/>
-            <a:ext cx="10972800" cy="914400"/>
-          </a:xfrm>
-          <a:prstGeom prst="rect">
-            <a:avLst/>
-          </a:prstGeom>
-        </p:spPr>
-        <p:txBody>
-          <a:bodyPr wrap="square"/>
-          <a:lstStyle/>
-          <a:p>
-            <a:r>
-              <a:rPr lang="en-US" sz="3600" b="1">
-                <a:solidFill>
-                  <a:srgbClr val="1B1E23"/>
-                </a:solidFill>
-                <a:latin typeface="Arial"/>
-              </a:rPr>
+      <p:grpSpPr>
+        <a:xfrm>
+          <a:off x="0" y="0"/>
+          <a:ext cx="0" cy="0"/>
+          <a:chOff x="0" y="0"/>
+          <a:chExt cx="0" cy="0"/>
+        </a:xfrm>
+      </p:grpSpPr>
+      <p:sp>
+        <p:nvSpPr>
+          <p:cNvPr id="2" name="Title 2"/>
+          <p:cNvSpPr>
+            <a:spLocks noGrp="1"/>
+          </p:cNvSpPr>
+          <p:nvPr>
+            <p:ph type="title"/>
+          </p:nvPr>
+        </p:nvSpPr>
+        <p:spPr/>
+        <p:txBody>
+          <a:bodyPr/>
+          <a:lstStyle/>
+          <a:p>
+            <a:r>
+              <a:rPr lang="en-US"/>
               <a:t>Second slide: shapes and picture</a:t>
             </a:r>
+            <a:endParaRPr lang="en-US"/>
           </a:p>
         </p:txBody>
       </p:sp>
@@ -381,47 +557,32 @@
             <a:avLst/>
           </a:prstGeom>
           <a:solidFill>
-            <a:srgbClr val="F29A38"/>
+            <a:schemeClr val="accent2"/>
           </a:solidFill>
           <a:ln>
             <a:noFill/>
           </a:ln>
         </p:spPr>
-      </p:sp>
-      <p:sp>
-        <p:nvSpPr>
-          <p:cNvPr id="4" name="Text 1"/>
-          <p:cNvSpPr txBox="1"/>
-          <p:nvPr/>
-        </p:nvSpPr>
-        <p:spPr>
-          <a:xfrm>
-            <a:off x="762000" y="2209800"/>
-            <a:ext cx="2895600" cy="609600"/>
-          </a:xfrm>
-          <a:prstGeom prst="rect">
-            <a:avLst/>
-          </a:prstGeom>
-        </p:spPr>
-        <p:txBody>
-          <a:bodyPr wrap="square"/>
-          <a:lstStyle/>
-          <a:p>
+        <p:txBody>
+          <a:bodyPr anchor="ctr"/>
+          <a:lstStyle/>
+          <a:p>
+            <a:pPr algn="ctr"/>
             <a:r>
               <a:rPr lang="en-US" sz="2000">
                 <a:solidFill>
-                  <a:srgbClr val="1B1E23"/>
+                  <a:schemeClr val="dk1"/>
                 </a:solidFill>
-                <a:latin typeface="Arial"/>
               </a:rPr>
               <a:t>Orange area</a:t>
             </a:r>
-          </a:p>
-        </p:txBody>
-      </p:sp>
-      <p:sp>
-        <p:nvSpPr>
-          <p:cNvPr id="5" name="Shape 5"/>
+            <a:endParaRPr lang="en-US"/>
+          </a:p>
+        </p:txBody>
+      </p:sp>
+      <p:sp>
+        <p:nvSpPr>
+          <p:cNvPr id="4" name="Shape 4"/>
           <p:cNvSpPr/>
           <p:nvPr/>
         </p:nvSpPr>
@@ -434,7 +595,7 @@
             <a:avLst/>
           </a:prstGeom>
           <a:solidFill>
-            <a:srgbClr val="5CC98B"/>
+            <a:schemeClr val="accent3"/>
           </a:solidFill>
           <a:ln>
             <a:noFill/>
@@ -443,8 +604,10 @@
       </p:sp>
       <p:pic>
         <p:nvPicPr>
-          <p:cNvPr id="6" name="Motif"/>
-          <p:cNvPicPr/>
+          <p:cNvPr id="5" name="Picture 5"/>
+          <p:cNvPicPr>
+            <a:picLocks noChangeAspect="1"/>
+          </p:cNvPicPr>
           <p:nvPr/>
         </p:nvPicPr>
         <p:blipFill>
@@ -474,24 +637,23 @@
 <file path=ppt/slides/slide3.xml><?xml version="1.0" encoding="utf-8"?>
 <p:sld xmlns:a="http://schemas.openxmlformats.org/drawingml/2006/main" xmlns:r="http://schemas.openxmlformats.org/officeDocument/2006/relationships" xmlns:p="http://schemas.openxmlformats.org/presentationml/2006/main">
   <p:cSld>
-    <p:bg>
-      <p:bgPr>
-        <a:solidFill>
-          <a:srgbClr val="FFFFFF"/>
-        </a:solidFill>
-        <a:effectLst/>
-      </p:bgPr>
-    </p:bg>
     <p:spTree>
       <p:nvGrpSpPr>
         <p:cNvPr id="1" name=""/>
         <p:cNvGrpSpPr/>
         <p:nvPr/>
       </p:nvGrpSpPr>
-      <p:grpSpPr/>
-      <p:sp>
-        <p:nvSpPr>
-          <p:cNvPr id="2" name="Title 1"/>
+      <p:grpSpPr>
+        <a:xfrm>
+          <a:off x="0" y="0"/>
+          <a:ext cx="0" cy="0"/>
+          <a:chOff x="0" y="0"/>
+          <a:chExt cx="0" cy="0"/>
+        </a:xfrm>
+      </p:grpSpPr>
+      <p:sp>
+        <p:nvSpPr>
+          <p:cNvPr id="6" name="Title 6"/>
           <p:cNvSpPr>
             <a:spLocks noGrp="1"/>
           </p:cNvSpPr>
@@ -508,12 +670,13 @@
               <a:rPr lang="en-US"/>
               <a:t>Third slide: placeholders and a group</a:t>
             </a:r>
-          </a:p>
-        </p:txBody>
-      </p:sp>
-      <p:sp>
-        <p:nvSpPr>
-          <p:cNvPr id="3" name="Content 2"/>
+            <a:endParaRPr lang="en-US"/>
+          </a:p>
+        </p:txBody>
+      </p:sp>
+      <p:sp>
+        <p:nvSpPr>
+          <p:cNvPr id="2" name="Content 2"/>
           <p:cNvSpPr>
             <a:spLocks noGrp="1"/>
           </p:cNvSpPr>
@@ -528,32 +691,35 @@
           <a:p>
             <a:r>
               <a:rPr lang="en-US"/>
-              <a:t>Position comes from the layout</a:t>
-            </a:r>
-          </a:p>
-          <a:p>
-            <a:r>
-              <a:rPr lang="en-US"/>
-              <a:t>Font and bullets come from the master</a:t>
-            </a:r>
-          </a:p>
-          <a:p>
-            <a:r>
-              <a:rPr lang="en-US"/>
-              <a:t>Right: two shapes in a group</a:t>
-            </a:r>
+              <a:t>Position, font and bullets come from the master</a:t>
+            </a:r>
+            <a:endParaRPr lang="en-US"/>
+          </a:p>
+          <a:p>
+            <a:r>
+              <a:rPr lang="en-US"/>
+              <a:t>The layout only names the placeholder</a:t>
+            </a:r>
+            <a:endParaRPr lang="en-US"/>
+          </a:p>
+          <a:p>
+            <a:r>
+              <a:rPr lang="en-US"/>
+              <a:t>Below on the right: two shapes in a group</a:t>
+            </a:r>
+            <a:endParaRPr lang="en-US"/>
           </a:p>
         </p:txBody>
       </p:sp>
       <p:grpSp>
         <p:nvGrpSpPr>
-          <p:cNvPr id="10" name="Group 1"/>
+          <p:cNvPr id="3" name="Group"/>
           <p:cNvGrpSpPr/>
           <p:nvPr/>
         </p:nvGrpSpPr>
         <p:grpSpPr>
           <a:xfrm>
-            <a:off x="7315200" y="2286000"/>
+            <a:off x="7315200" y="3810000"/>
             <a:ext cx="3657600" cy="1828800"/>
             <a:chOff x="0" y="0"/>
             <a:chExt cx="1828800" cy="914400"/>
@@ -561,47 +727,67 @@
         </p:grpSpPr>
         <p:sp>
           <p:nvSpPr>
-            <p:cNvPr id="11" name="Shape 11"/>
+            <p:cNvPr id="4" name="Shape 4"/>
             <p:cNvSpPr/>
             <p:nvPr/>
           </p:nvSpPr>
           <p:spPr>
             <a:xfrm>
               <a:off x="0" y="0"/>
-              <a:ext cx="880000" cy="914400"/>
+              <a:ext cx="876300" cy="914400"/>
             </a:xfrm>
             <a:prstGeom prst="rect">
               <a:avLst/>
             </a:prstGeom>
-            <a:solidFill>
-              <a:srgbClr val="F29A38"/>
-            </a:solidFill>
-            <a:ln>
-              <a:noFill/>
-            </a:ln>
           </p:spPr>
+          <p:style>
+            <a:lnRef idx="2">
+              <a:schemeClr val="accent2">
+                <a:shade val="50000"/>
+              </a:schemeClr>
+            </a:lnRef>
+            <a:fillRef idx="1">
+              <a:schemeClr val="accent2"/>
+            </a:fillRef>
+            <a:effectRef idx="0">
+              <a:schemeClr val="accent2"/>
+            </a:effectRef>
+            <a:fontRef idx="minor">
+              <a:schemeClr val="lt1"/>
+            </a:fontRef>
+          </p:style>
         </p:sp>
         <p:sp>
           <p:nvSpPr>
-            <p:cNvPr id="12" name="Shape 12"/>
+            <p:cNvPr id="5" name="Shape 5"/>
             <p:cNvSpPr/>
             <p:nvPr/>
           </p:nvSpPr>
           <p:spPr>
             <a:xfrm>
-              <a:off x="948800" y="0"/>
-              <a:ext cx="880000" cy="914400"/>
+              <a:off x="952500" y="0"/>
+              <a:ext cx="876300" cy="914400"/>
             </a:xfrm>
             <a:prstGeom prst="ellipse">
               <a:avLst/>
             </a:prstGeom>
-            <a:solidFill>
-              <a:srgbClr val="5CC98B"/>
-            </a:solidFill>
-            <a:ln>
-              <a:noFill/>
-            </a:ln>
           </p:spPr>
+          <p:style>
+            <a:lnRef idx="2">
+              <a:schemeClr val="accent3">
+                <a:shade val="50000"/>
+              </a:schemeClr>
+            </a:lnRef>
+            <a:fillRef idx="1">
+              <a:schemeClr val="accent3"/>
+            </a:fillRef>
+            <a:effectRef idx="0">
+              <a:schemeClr val="accent3"/>
+            </a:effectRef>
+            <a:fontRef idx="minor">
+              <a:schemeClr val="lt1"/>
+            </a:fontRef>
+          </p:style>
         </p:sp>
       </p:grpSp>
     </p:spTree>
@@ -613,9 +799,9 @@
 </file>
 
 <file path=ppt/theme/theme1.xml><?xml version="1.0" encoding="utf-8"?>
-<a:theme xmlns:a="http://schemas.openxmlformats.org/drawingml/2006/main" name="Everything">
+<a:theme xmlns:a="http://schemas.openxmlformats.org/drawingml/2006/main" name="Sample">
   <a:themeElements>
-    <a:clrScheme name="Everything">
+    <a:clrScheme name="Sample">
       <a:dk1>
         <a:srgbClr val="1B1E23"/>
       </a:dk1>
@@ -623,75 +809,95 @@
         <a:srgbClr val="FFFFFF"/>
       </a:lt1>
       <a:dk2>
-        <a:srgbClr val="2D323A"/>
+        <a:srgbClr val="2D3A4A"/>
       </a:dk2>
       <a:lt2>
-        <a:srgbClr val="F3F4F6"/>
+        <a:srgbClr val="EEF1F4"/>
       </a:lt2>
       <a:accent1>
-        <a:srgbClr val="F29A38"/>
+        <a:srgbClr val="2F6DB5"/>
       </a:accent1>
       <a:accent2>
-        <a:srgbClr val="5CC98B"/>
+        <a:srgbClr val="E2783A"/>
       </a:accent2>
       <a:accent3>
-        <a:srgbClr val="9AA6FF"/>
+        <a:srgbClr val="3E9C5C"/>
       </a:accent3>
       <a:accent4>
-        <a:srgbClr val="E8C547"/>
+        <a:srgbClr val="D9A82B"/>
       </a:accent4>
       <a:accent5>
-        <a:srgbClr val="F07470"/>
+        <a:srgbClr val="8A5BB8"/>
       </a:accent5>
       <a:accent6>
-        <a:srgbClr val="7F8994"/>
+        <a:srgbClr val="C94F64"/>
       </a:accent6>
       <a:hlink>
-        <a:srgbClr val="AD5A0C"/>
+        <a:srgbClr val="1F64C8"/>
       </a:hlink>
       <a:folHlink>
-        <a:srgbClr val="7F8994"/>
+        <a:srgbClr val="7B5AA6"/>
       </a:folHlink>
     </a:clrScheme>
-    <a:fontScheme name="Everything">
+    <a:fontScheme name="Sample">
       <a:majorFont>
-        <a:latin typeface="Arial"/>
+        <a:latin typeface="Calibri Light"/>
         <a:ea typeface=""/>
         <a:cs typeface=""/>
       </a:majorFont>
       <a:minorFont>
-        <a:latin typeface="Arial"/>
+        <a:latin typeface="Calibri"/>
         <a:ea typeface=""/>
         <a:cs typeface=""/>
       </a:minorFont>
     </a:fontScheme>
-    <a:fmtScheme name="Everything">
+    <a:fmtScheme name="Sample">
       <a:fillStyleLst>
         <a:solidFill>
           <a:schemeClr val="phClr"/>
         </a:solidFill>
+        <a:gradFill rotWithShape="1">
+          <a:gsLst>
+            <a:gs pos="0">
+              <a:schemeClr val="phClr">
+                <a:tint val="70000"/>
+              </a:schemeClr>
+            </a:gs>
+            <a:gs pos="100000">
+              <a:schemeClr val="phClr">
+                <a:shade val="90000"/>
+              </a:schemeClr>
+            </a:gs>
+          </a:gsLst>
+          <a:lin ang="5400000" scaled="0"/>
+        </a:gradFill>
         <a:solidFill>
-          <a:schemeClr val="phClr"/>
-        </a:solidFill>
-        <a:solidFill>
-          <a:schemeClr val="phClr"/>
+          <a:schemeClr val="phClr">
+            <a:shade val="80000"/>
+          </a:schemeClr>
         </a:solidFill>
       </a:fillStyleLst>
       <a:lnStyleLst>
-        <a:ln w="9525">
+        <a:ln w="6350" cap="flat" cmpd="sng" algn="ctr">
           <a:solidFill>
             <a:schemeClr val="phClr"/>
           </a:solidFill>
+          <a:prstDash val="solid"/>
+          <a:miter lim="800000"/>
         </a:ln>
-        <a:ln w="9525">
+        <a:ln w="12700" cap="flat" cmpd="sng" algn="ctr">
           <a:solidFill>
             <a:schemeClr val="phClr"/>
           </a:solidFill>
+          <a:prstDash val="solid"/>
+          <a:miter lim="800000"/>
         </a:ln>
-        <a:ln w="9525">
+        <a:ln w="19050" cap="flat" cmpd="sng" algn="ctr">
           <a:solidFill>
             <a:schemeClr val="phClr"/>
           </a:solidFill>
+          <a:prstDash val="solid"/>
+          <a:miter lim="800000"/>
         </a:ln>
       </a:lnStyleLst>
       <a:effectStyleLst>
@@ -710,11 +916,25 @@
           <a:schemeClr val="phClr"/>
         </a:solidFill>
         <a:solidFill>
-          <a:schemeClr val="phClr"/>
+          <a:schemeClr val="phClr">
+            <a:tint val="95000"/>
+          </a:schemeClr>
         </a:solidFill>
-        <a:solidFill>
-          <a:schemeClr val="phClr"/>
-        </a:solidFill>
+        <a:gradFill rotWithShape="1">
+          <a:gsLst>
+            <a:gs pos="0">
+              <a:schemeClr val="phClr">
+                <a:tint val="95000"/>
+              </a:schemeClr>
+            </a:gs>
+            <a:gs pos="100000">
+              <a:schemeClr val="phClr">
+                <a:shade val="85000"/>
+              </a:schemeClr>
+            </a:gs>
+          </a:gsLst>
+          <a:lin ang="5400000" scaled="0"/>
+        </a:gradFill>
       </a:bgFillStyleLst>
     </a:fmtScheme>
   </a:themeElements>
